--- a/data-eng/decks/w6d3s1.pptx
+++ b/data-eng/decks/w6d3s1.pptx
@@ -3100,7 +3100,7 @@
       <p:grpSpPr/>
       <p:sp>
         <p:nvSpPr>
-          <p:cNvPr id="2" name="Oval 1"/>
+          <p:cNvPr id="2" name="deckgen:decor"/>
           <p:cNvSpPr/>
           <p:nvPr/>
         </p:nvSpPr>
@@ -3130,7 +3130,7 @@
       </p:sp>
       <p:sp>
         <p:nvSpPr>
-          <p:cNvPr id="3" name="Oval 2"/>
+          <p:cNvPr id="3" name="deckgen:decor"/>
           <p:cNvSpPr/>
           <p:nvPr/>
         </p:nvSpPr>
@@ -3160,7 +3160,7 @@
       </p:sp>
       <p:sp>
         <p:nvSpPr>
-          <p:cNvPr id="4" name="Oval 3"/>
+          <p:cNvPr id="4" name="deckgen:decor"/>
           <p:cNvSpPr/>
           <p:nvPr/>
         </p:nvSpPr>
@@ -3190,7 +3190,7 @@
       </p:sp>
       <p:sp>
         <p:nvSpPr>
-          <p:cNvPr id="5" name="Rectangle 4"/>
+          <p:cNvPr id="5" name="deckgen:decor"/>
           <p:cNvSpPr/>
           <p:nvPr/>
         </p:nvSpPr>
@@ -3220,7 +3220,7 @@
       </p:sp>
       <p:sp>
         <p:nvSpPr>
-          <p:cNvPr id="6" name="Oval 5"/>
+          <p:cNvPr id="6" name="deckgen:decor"/>
           <p:cNvSpPr/>
           <p:nvPr/>
         </p:nvSpPr>
@@ -3250,7 +3250,7 @@
       </p:sp>
       <p:sp>
         <p:nvSpPr>
-          <p:cNvPr id="7" name="Oval 6"/>
+          <p:cNvPr id="7" name="deckgen:decor"/>
           <p:cNvSpPr/>
           <p:nvPr/>
         </p:nvSpPr>
@@ -3280,7 +3280,7 @@
       </p:sp>
       <p:sp>
         <p:nvSpPr>
-          <p:cNvPr id="8" name="Oval 7"/>
+          <p:cNvPr id="8" name="deckgen:decor"/>
           <p:cNvSpPr/>
           <p:nvPr/>
         </p:nvSpPr>
@@ -3310,7 +3310,7 @@
       </p:sp>
       <p:sp>
         <p:nvSpPr>
-          <p:cNvPr id="9" name="Oval 8"/>
+          <p:cNvPr id="9" name="deckgen:decor"/>
           <p:cNvSpPr/>
           <p:nvPr/>
         </p:nvSpPr>
@@ -3340,7 +3340,7 @@
       </p:sp>
       <p:sp>
         <p:nvSpPr>
-          <p:cNvPr id="10" name="Rectangle 9"/>
+          <p:cNvPr id="10" name="deckgen:decor"/>
           <p:cNvSpPr/>
           <p:nvPr/>
         </p:nvSpPr>
@@ -3600,7 +3600,7 @@
       <p:grpSpPr/>
       <p:sp>
         <p:nvSpPr>
-          <p:cNvPr id="2" name="Oval 1"/>
+          <p:cNvPr id="2" name="deckgen:decor"/>
           <p:cNvSpPr/>
           <p:nvPr/>
         </p:nvSpPr>
@@ -3630,7 +3630,7 @@
       </p:sp>
       <p:sp>
         <p:nvSpPr>
-          <p:cNvPr id="3" name="Oval 2"/>
+          <p:cNvPr id="3" name="deckgen:decor"/>
           <p:cNvSpPr/>
           <p:nvPr/>
         </p:nvSpPr>
@@ -3660,7 +3660,7 @@
       </p:sp>
       <p:sp>
         <p:nvSpPr>
-          <p:cNvPr id="4" name="Oval 3"/>
+          <p:cNvPr id="4" name="deckgen:decor"/>
           <p:cNvSpPr/>
           <p:nvPr/>
         </p:nvSpPr>
@@ -4662,7 +4662,7 @@
       <p:grpSpPr/>
       <p:sp>
         <p:nvSpPr>
-          <p:cNvPr id="2" name="Oval 1"/>
+          <p:cNvPr id="2" name="deckgen:decor"/>
           <p:cNvSpPr/>
           <p:nvPr/>
         </p:nvSpPr>
@@ -4692,7 +4692,7 @@
       </p:sp>
       <p:sp>
         <p:nvSpPr>
-          <p:cNvPr id="3" name="Oval 2"/>
+          <p:cNvPr id="3" name="deckgen:decor"/>
           <p:cNvSpPr/>
           <p:nvPr/>
         </p:nvSpPr>
@@ -4915,7 +4915,7 @@
         </p:nvSpPr>
         <p:spPr>
           <a:xfrm>
-            <a:off x="1428750" y="5486400"/>
+            <a:off x="1428750" y="5476875"/>
             <a:ext cx="419100" cy="381000"/>
           </a:xfrm>
           <a:prstGeom prst="rect">
@@ -4956,7 +4956,7 @@
         </p:nvSpPr>
         <p:spPr>
           <a:xfrm>
-            <a:off x="1905000" y="5486400"/>
+            <a:off x="1905000" y="5476875"/>
             <a:ext cx="6724650" cy="381000"/>
           </a:xfrm>
           <a:prstGeom prst="rect">
@@ -5031,7 +5031,7 @@
         </p:nvSpPr>
         <p:spPr>
           <a:xfrm>
-            <a:off x="9658350" y="5486400"/>
+            <a:off x="9658350" y="5476875"/>
             <a:ext cx="419100" cy="381000"/>
           </a:xfrm>
           <a:prstGeom prst="rect">
@@ -5072,7 +5072,7 @@
         </p:nvSpPr>
         <p:spPr>
           <a:xfrm>
-            <a:off x="10134600" y="5486400"/>
+            <a:off x="10134600" y="5476875"/>
             <a:ext cx="6724650" cy="381000"/>
           </a:xfrm>
           <a:prstGeom prst="rect">
@@ -5147,7 +5147,7 @@
         </p:nvSpPr>
         <p:spPr>
           <a:xfrm>
-            <a:off x="1428750" y="6515100"/>
+            <a:off x="1428750" y="6505575"/>
             <a:ext cx="419100" cy="381000"/>
           </a:xfrm>
           <a:prstGeom prst="rect">
@@ -5188,7 +5188,7 @@
         </p:nvSpPr>
         <p:spPr>
           <a:xfrm>
-            <a:off x="1905000" y="6515100"/>
+            <a:off x="1905000" y="6505575"/>
             <a:ext cx="6724650" cy="381000"/>
           </a:xfrm>
           <a:prstGeom prst="rect">
@@ -5263,7 +5263,7 @@
         </p:nvSpPr>
         <p:spPr>
           <a:xfrm>
-            <a:off x="9658350" y="6515100"/>
+            <a:off x="9658350" y="6505575"/>
             <a:ext cx="419100" cy="381000"/>
           </a:xfrm>
           <a:prstGeom prst="rect">
@@ -5304,7 +5304,7 @@
         </p:nvSpPr>
         <p:spPr>
           <a:xfrm>
-            <a:off x="10134600" y="6515100"/>
+            <a:off x="10134600" y="6505575"/>
             <a:ext cx="6724650" cy="381000"/>
           </a:xfrm>
           <a:prstGeom prst="rect">
@@ -5444,7 +5444,7 @@
                 <a:ea typeface="Pretendard"/>
                 <a:cs typeface="Pretendard"/>
               </a:rPr>
-              <a:t>6-2 compose 기동 · orders 토픽 · .venv</a:t>
+              <a:t>실습점검 — compose 켜고 orders 비우기</a:t>
             </a:r>
           </a:p>
         </p:txBody>
@@ -5469,7 +5469,7 @@
       <p:grpSpPr/>
       <p:sp>
         <p:nvSpPr>
-          <p:cNvPr id="2" name="Oval 1"/>
+          <p:cNvPr id="2" name="deckgen:decor"/>
           <p:cNvSpPr/>
           <p:nvPr/>
         </p:nvSpPr>
@@ -5499,7 +5499,7 @@
       </p:sp>
       <p:sp>
         <p:nvSpPr>
-          <p:cNvPr id="3" name="Oval 2"/>
+          <p:cNvPr id="3" name="deckgen:decor"/>
           <p:cNvSpPr/>
           <p:nvPr/>
         </p:nvSpPr>
@@ -5529,7 +5529,7 @@
       </p:sp>
       <p:sp>
         <p:nvSpPr>
-          <p:cNvPr id="4" name="Oval 3"/>
+          <p:cNvPr id="4" name="deckgen:decor"/>
           <p:cNvSpPr/>
           <p:nvPr/>
         </p:nvSpPr>
@@ -6460,7 +6460,7 @@
       <p:grpSpPr/>
       <p:sp>
         <p:nvSpPr>
-          <p:cNvPr id="2" name="Oval 1"/>
+          <p:cNvPr id="2" name="deckgen:decor"/>
           <p:cNvSpPr/>
           <p:nvPr/>
         </p:nvSpPr>
@@ -6490,7 +6490,7 @@
       </p:sp>
       <p:sp>
         <p:nvSpPr>
-          <p:cNvPr id="3" name="Oval 2"/>
+          <p:cNvPr id="3" name="deckgen:decor"/>
           <p:cNvSpPr/>
           <p:nvPr/>
         </p:nvSpPr>
@@ -6520,7 +6520,7 @@
       </p:sp>
       <p:sp>
         <p:nvSpPr>
-          <p:cNvPr id="4" name="Oval 3"/>
+          <p:cNvPr id="4" name="deckgen:decor"/>
           <p:cNvSpPr/>
           <p:nvPr/>
         </p:nvSpPr>
@@ -7654,7 +7654,7 @@
       <p:grpSpPr/>
       <p:sp>
         <p:nvSpPr>
-          <p:cNvPr id="2" name="Oval 1"/>
+          <p:cNvPr id="2" name="deckgen:decor"/>
           <p:cNvSpPr/>
           <p:nvPr/>
         </p:nvSpPr>
@@ -7684,7 +7684,7 @@
       </p:sp>
       <p:sp>
         <p:nvSpPr>
-          <p:cNvPr id="3" name="Oval 2"/>
+          <p:cNvPr id="3" name="deckgen:decor"/>
           <p:cNvSpPr/>
           <p:nvPr/>
         </p:nvSpPr>
@@ -7714,7 +7714,7 @@
       </p:sp>
       <p:sp>
         <p:nvSpPr>
-          <p:cNvPr id="4" name="Oval 3"/>
+          <p:cNvPr id="4" name="deckgen:decor"/>
           <p:cNvSpPr/>
           <p:nvPr/>
         </p:nvSpPr>
@@ -8708,7 +8708,7 @@
                 <a:ea typeface="Pretendard"/>
                 <a:cs typeface="Pretendard"/>
               </a:rPr>
-              <a:t>flush() 를 빠뜨리는 것이 이 주차에서 가장 흔한 실수 — 오류도 없이 정상 종료되는데 일부가 사라진다. try/finally 로 감싸 두세요</a:t>
+              <a:t>flush() 를 빠뜨리는 것이 이 주차에서 가장 흔한 실수 — 오류 없이 정상 종료되는데 버퍼에 남은 것이 사라진다(실습 실측 1000 건 중 0 건). try/finally 로 감싸 두세요</a:t>
             </a:r>
           </a:p>
         </p:txBody>
@@ -8845,7 +8845,7 @@
       <p:grpSpPr/>
       <p:sp>
         <p:nvSpPr>
-          <p:cNvPr id="2" name="Oval 1"/>
+          <p:cNvPr id="2" name="deckgen:decor"/>
           <p:cNvSpPr/>
           <p:nvPr/>
         </p:nvSpPr>
@@ -8875,7 +8875,7 @@
       </p:sp>
       <p:sp>
         <p:nvSpPr>
-          <p:cNvPr id="3" name="Oval 2"/>
+          <p:cNvPr id="3" name="deckgen:decor"/>
           <p:cNvSpPr/>
           <p:nvPr/>
         </p:nvSpPr>
@@ -8905,7 +8905,7 @@
       </p:sp>
       <p:sp>
         <p:nvSpPr>
-          <p:cNvPr id="4" name="Oval 3"/>
+          <p:cNvPr id="4" name="deckgen:decor"/>
           <p:cNvSpPr/>
           <p:nvPr/>
         </p:nvSpPr>
@@ -10402,7 +10402,7 @@
       <p:grpSpPr/>
       <p:sp>
         <p:nvSpPr>
-          <p:cNvPr id="2" name="Oval 1"/>
+          <p:cNvPr id="2" name="deckgen:decor"/>
           <p:cNvSpPr/>
           <p:nvPr/>
         </p:nvSpPr>
@@ -10432,7 +10432,7 @@
       </p:sp>
       <p:sp>
         <p:nvSpPr>
-          <p:cNvPr id="3" name="Oval 2"/>
+          <p:cNvPr id="3" name="deckgen:decor"/>
           <p:cNvSpPr/>
           <p:nvPr/>
         </p:nvSpPr>
@@ -10462,7 +10462,7 @@
       </p:sp>
       <p:sp>
         <p:nvSpPr>
-          <p:cNvPr id="4" name="Oval 3"/>
+          <p:cNvPr id="4" name="deckgen:decor"/>
           <p:cNvSpPr/>
           <p:nvPr/>
         </p:nvSpPr>
@@ -11500,7 +11500,7 @@
       <p:grpSpPr/>
       <p:sp>
         <p:nvSpPr>
-          <p:cNvPr id="2" name="Oval 1"/>
+          <p:cNvPr id="2" name="deckgen:decor"/>
           <p:cNvSpPr/>
           <p:nvPr/>
         </p:nvSpPr>
@@ -11530,7 +11530,7 @@
       </p:sp>
       <p:sp>
         <p:nvSpPr>
-          <p:cNvPr id="3" name="Oval 2"/>
+          <p:cNvPr id="3" name="deckgen:decor"/>
           <p:cNvSpPr/>
           <p:nvPr/>
         </p:nvSpPr>
@@ -11560,7 +11560,7 @@
       </p:sp>
       <p:sp>
         <p:nvSpPr>
-          <p:cNvPr id="4" name="Oval 3"/>
+          <p:cNvPr id="4" name="deckgen:decor"/>
           <p:cNvSpPr/>
           <p:nvPr/>
         </p:nvSpPr>
@@ -12561,7 +12561,7 @@
       <p:grpSpPr/>
       <p:sp>
         <p:nvSpPr>
-          <p:cNvPr id="2" name="Oval 1"/>
+          <p:cNvPr id="2" name="deckgen:decor"/>
           <p:cNvSpPr/>
           <p:nvPr/>
         </p:nvSpPr>
@@ -12591,7 +12591,7 @@
       </p:sp>
       <p:sp>
         <p:nvSpPr>
-          <p:cNvPr id="3" name="Oval 2"/>
+          <p:cNvPr id="3" name="deckgen:decor"/>
           <p:cNvSpPr/>
           <p:nvPr/>
         </p:nvSpPr>
@@ -12621,7 +12621,7 @@
       </p:sp>
       <p:sp>
         <p:nvSpPr>
-          <p:cNvPr id="4" name="Oval 3"/>
+          <p:cNvPr id="4" name="deckgen:decor"/>
           <p:cNvSpPr/>
           <p:nvPr/>
         </p:nvSpPr>
@@ -13659,7 +13659,7 @@
       <p:grpSpPr/>
       <p:sp>
         <p:nvSpPr>
-          <p:cNvPr id="2" name="Oval 1"/>
+          <p:cNvPr id="2" name="deckgen:decor"/>
           <p:cNvSpPr/>
           <p:nvPr/>
         </p:nvSpPr>
@@ -13689,7 +13689,7 @@
       </p:sp>
       <p:sp>
         <p:nvSpPr>
-          <p:cNvPr id="3" name="Oval 2"/>
+          <p:cNvPr id="3" name="deckgen:decor"/>
           <p:cNvSpPr/>
           <p:nvPr/>
         </p:nvSpPr>
@@ -13719,7 +13719,7 @@
       </p:sp>
       <p:sp>
         <p:nvSpPr>
-          <p:cNvPr id="4" name="Oval 3"/>
+          <p:cNvPr id="4" name="deckgen:decor"/>
           <p:cNvSpPr/>
           <p:nvPr/>
         </p:nvSpPr>
@@ -13925,7 +13925,7 @@
       </p:sp>
       <p:sp>
         <p:nvSpPr>
-          <p:cNvPr id="10" name="TextBox 9"/>
+          <p:cNvPr id="10" name="deckgen:ornament"/>
           <p:cNvSpPr txBox="1"/>
           <p:nvPr/>
         </p:nvSpPr>
@@ -14110,7 +14110,7 @@
       </p:sp>
       <p:sp>
         <p:nvSpPr>
-          <p:cNvPr id="14" name="TextBox 13"/>
+          <p:cNvPr id="14" name="deckgen:ornament"/>
           <p:cNvSpPr txBox="1"/>
           <p:nvPr/>
         </p:nvSpPr>
@@ -14295,7 +14295,7 @@
       </p:sp>
       <p:sp>
         <p:nvSpPr>
-          <p:cNvPr id="18" name="TextBox 17"/>
+          <p:cNvPr id="18" name="deckgen:ornament"/>
           <p:cNvSpPr txBox="1"/>
           <p:nvPr/>
         </p:nvSpPr>
